--- a/docs/decks/BrokerVerse_Sales_Relationship_Manager_Guide.pptx
+++ b/docs/decks/BrokerVerse_Sales_Relationship_Manager_Guide.pptx
@@ -3273,7 +3273,7 @@
                 </a:solidFill>
                 <a:latin typeface="Calibri"/>
               </a:rPr>
-              <a:t>BDO Insure (BDOI) insurance broking · Philippines · PHP</a:t>
+              <a:t>BrokerVerse OOTB · insurance broking · Philippines · PHP</a:t>
             </a:r>
           </a:p>
         </p:txBody>
@@ -3820,7 +3820,7 @@
                 </a:solidFill>
                 <a:latin typeface="Calibri"/>
               </a:rPr>
-              <a:t>Home (business overview dashboard)</a:t>
+              <a:t>Executive Dashboard</a:t>
             </a:r>
           </a:p>
         </p:txBody>
@@ -4079,7 +4079,7 @@
                 </a:solidFill>
                 <a:latin typeface="Calibri"/>
               </a:rPr>
-              <a:t>Operational reports</a:t>
+              <a:t>Reports</a:t>
             </a:r>
           </a:p>
         </p:txBody>
@@ -4093,7 +4093,7 @@
         <p:spPr>
           <a:xfrm>
             <a:off x="420624" y="1243584"/>
-            <a:ext cx="7342631" cy="4207668"/>
+            <a:ext cx="5641510" cy="4599432"/>
           </a:xfrm>
           <a:prstGeom prst="rect">
             <a:avLst/>
@@ -4147,7 +4147,7 @@
         <p:spPr>
           <a:xfrm>
             <a:off x="457200" y="1280160"/>
-            <a:ext cx="7269480" cy="4134516"/>
+            <a:ext cx="5568358" cy="4526280"/>
           </a:xfrm>
           <a:prstGeom prst="rect">
             <a:avLst/>
@@ -4167,7 +4167,7 @@
         </p:nvSpPr>
         <p:spPr>
           <a:xfrm>
-            <a:off x="457200" y="5506116"/>
+            <a:off x="457200" y="5897879"/>
             <a:ext cx="7269480" cy="274320"/>
           </a:xfrm>
           <a:prstGeom prst="rect">
@@ -4187,7 +4187,7 @@
                 </a:solidFill>
                 <a:latin typeface="Calibri"/>
               </a:rPr>
-              <a:t>Live screen — Reports &gt; Operational Reports &gt; Production — signed in as maria.sales</a:t>
+              <a:t>Live screen — Production Register with Preview — signed in as maria.sales</a:t>
             </a:r>
           </a:p>
         </p:txBody>
@@ -4268,7 +4268,7 @@
                 </a:solidFill>
                 <a:latin typeface="Calibri"/>
               </a:rPr>
-              <a:t>Reports &gt; Operational Reports</a:t>
+              <a:t>Reports &gt; All Reports / Operational Reports</a:t>
             </a:r>
           </a:p>
         </p:txBody>
@@ -4310,7 +4310,7 @@
                 </a:solidFill>
                 <a:latin typeface="Calibri"/>
               </a:rPr>
-              <a:t>Purpose:  </a:t>
+              <a:t>Catalogue:  </a:t>
             </a:r>
             <a:r>
               <a:rPr sz="1500">
@@ -4319,7 +4319,7 @@
                 </a:solidFill>
                 <a:latin typeface="Calibri"/>
               </a:rPr>
-              <a:t>Production, Claims, Renewal, Remittance and Broker Commission.</a:t>
+              <a:t>Reports &gt; All Reports lists your 12 reports, with search.</a:t>
             </a:r>
           </a:p>
           <a:p>
@@ -4349,7 +4349,7 @@
                 </a:solidFill>
                 <a:latin typeface="Calibri"/>
               </a:rPr>
-              <a:t>report criteria, from / to date, agent, company, branch, client.</a:t>
+              <a:t>report criteria, From / To date, agent, principal insurer, branch, client, product.</a:t>
             </a:r>
           </a:p>
           <a:p>
@@ -4370,6 +4370,36 @@
                 </a:solidFill>
                 <a:latin typeface="Calibri"/>
               </a:rPr>
+              <a:t>Preview:  </a:t>
+            </a:r>
+            <a:r>
+              <a:rPr sz="1500">
+                <a:solidFill>
+                  <a:srgbClr val="1F2937"/>
+                </a:solidFill>
+                <a:latin typeface="Calibri"/>
+              </a:rPr>
+              <a:t>the first page on screen before you generate.</a:t>
+            </a:r>
+          </a:p>
+          <a:p>
+            <a:pPr marL="201168" indent="-182880">
+              <a:spcAft>
+                <a:spcPts val="1000"/>
+              </a:spcAft>
+              <a:buClr>
+                <a:srgbClr val="1E88E5"/>
+              </a:buClr>
+              <a:buFont typeface="Arial"/>
+              <a:buChar char="•"/>
+            </a:pPr>
+            <a:r>
+              <a:rPr b="1" sz="1500">
+                <a:solidFill>
+                  <a:srgbClr val="0B4F9C"/>
+                </a:solidFill>
+                <a:latin typeface="Calibri"/>
+              </a:rPr>
               <a:t>Formats:  </a:t>
             </a:r>
             <a:r>
@@ -4379,7 +4409,7 @@
                 </a:solidFill>
                 <a:latin typeface="Calibri"/>
               </a:rPr>
-              <a:t>CSV, XLSX, PDF; generated files are kept in the history.</a:t>
+              <a:t>CSV, Excel (XLSX) or PDF.</a:t>
             </a:r>
           </a:p>
         </p:txBody>
@@ -7212,7 +7242,7 @@
                 </a:solidFill>
                 <a:latin typeface="Calibri"/>
               </a:rPr>
-              <a:t>REPORTS &gt; OPERATIONAL / FINANCIAL</a:t>
+              <a:t>REPORTS &gt; ALL REPORTS</a:t>
             </a:r>
           </a:p>
         </p:txBody>
@@ -7706,7 +7736,7 @@
                 </a:solidFill>
                 <a:latin typeface="Calibri"/>
               </a:rPr>
-              <a:t>Also via the report API: SOA, Receivables Ageing, Incentive Results.</a:t>
+              <a:t>Twelve reports in Reports &gt; All Reports.</a:t>
             </a:r>
           </a:p>
         </p:txBody>
@@ -7721,7 +7751,7 @@
         </p:nvGraphicFramePr>
         <p:xfrm>
           <a:off x="457200" y="1783080"/>
-          <a:ext cx="11274550" cy="4114800"/>
+          <a:ext cx="5541262" cy="3657600"/>
         </p:xfrm>
         <a:graphic>
           <a:graphicData uri="http://schemas.openxmlformats.org/drawingml/2006/table">
@@ -7730,24 +7760,23 @@
                 <a:tableStyleId>{5C22544A-7EE6-4342-B048-85BDC9FD1C3A}</a:tableStyleId>
               </a:tblPr>
               <a:tblGrid>
-                <a:gridCol w="2383238"/>
-                <a:gridCol w="6049759"/>
-                <a:gridCol w="2841553"/>
+                <a:gridCol w="1920239"/>
+                <a:gridCol w="3621023"/>
               </a:tblGrid>
-              <a:tr h="411480">
+              <a:tr h="365760">
                 <a:tc>
                   <a:txBody>
                     <a:bodyPr wrap="square"/>
                     <a:lstStyle/>
                     <a:p>
                       <a:r>
-                        <a:rPr sz="1100" b="1">
+                        <a:rPr sz="950" b="1">
                           <a:solidFill>
                             <a:srgbClr val="FFFFFF"/>
                           </a:solidFill>
                           <a:latin typeface="Calibri"/>
                         </a:rPr>
-                        <a:t>Report</a:t>
+                        <a:t>Operational report</a:t>
                       </a:r>
                     </a:p>
                   </a:txBody>
@@ -7763,7 +7792,7 @@
                     <a:lstStyle/>
                     <a:p>
                       <a:r>
-                        <a:rPr sz="1100" b="1">
+                        <a:rPr sz="950" b="1">
                           <a:solidFill>
                             <a:srgbClr val="FFFFFF"/>
                           </a:solidFill>
@@ -7779,37 +7808,15 @@
                     </a:solidFill>
                   </a:tcPr>
                 </a:tc>
+              </a:tr>
+              <a:tr h="365760">
                 <a:tc>
                   <a:txBody>
                     <a:bodyPr wrap="square"/>
                     <a:lstStyle/>
                     <a:p>
                       <a:r>
-                        <a:rPr sz="1100" b="1">
-                          <a:solidFill>
-                            <a:srgbClr val="FFFFFF"/>
-                          </a:solidFill>
-                          <a:latin typeface="Calibri"/>
-                        </a:rPr>
-                        <a:t>Where</a:t>
-                      </a:r>
-                    </a:p>
-                  </a:txBody>
-                  <a:tcPr marL="73152" marR="73152" marT="27432" marB="27432" anchor="ctr">
-                    <a:solidFill>
-                      <a:srgbClr val="0B4F9C"/>
-                    </a:solidFill>
-                  </a:tcPr>
-                </a:tc>
-              </a:tr>
-              <a:tr h="411480">
-                <a:tc>
-                  <a:txBody>
-                    <a:bodyPr wrap="square"/>
-                    <a:lstStyle/>
-                    <a:p>
-                      <a:r>
-                        <a:rPr sz="1100" b="1">
+                        <a:rPr sz="950" b="1">
                           <a:solidFill>
                             <a:srgbClr val="0B4F9C"/>
                           </a:solidFill>
@@ -7831,7 +7838,7 @@
                     <a:lstStyle/>
                     <a:p>
                       <a:r>
-                        <a:rPr sz="1100">
+                        <a:rPr sz="950">
                           <a:solidFill>
                             <a:srgbClr val="1F2937"/>
                           </a:solidFill>
@@ -7847,37 +7854,15 @@
                     </a:solidFill>
                   </a:tcPr>
                 </a:tc>
+              </a:tr>
+              <a:tr h="365760">
                 <a:tc>
                   <a:txBody>
                     <a:bodyPr wrap="square"/>
                     <a:lstStyle/>
                     <a:p>
                       <a:r>
-                        <a:rPr sz="1100">
-                          <a:solidFill>
-                            <a:srgbClr val="1F2937"/>
-                          </a:solidFill>
-                          <a:latin typeface="Calibri"/>
-                        </a:rPr>
-                        <a:t>Reports &gt; Operational &gt; Production</a:t>
-                      </a:r>
-                    </a:p>
-                  </a:txBody>
-                  <a:tcPr marL="73152" marR="73152" marT="27432" marB="27432" anchor="ctr">
-                    <a:solidFill>
-                      <a:srgbClr val="F5F8FC"/>
-                    </a:solidFill>
-                  </a:tcPr>
-                </a:tc>
-              </a:tr>
-              <a:tr h="411480">
-                <a:tc>
-                  <a:txBody>
-                    <a:bodyPr wrap="square"/>
-                    <a:lstStyle/>
-                    <a:p>
-                      <a:r>
-                        <a:rPr sz="1100" b="1">
+                        <a:rPr sz="950" b="1">
                           <a:solidFill>
                             <a:srgbClr val="0B4F9C"/>
                           </a:solidFill>
@@ -7899,7 +7884,7 @@
                     <a:lstStyle/>
                     <a:p>
                       <a:r>
-                        <a:rPr sz="1100">
+                        <a:rPr sz="950">
                           <a:solidFill>
                             <a:srgbClr val="1F2937"/>
                           </a:solidFill>
@@ -7915,37 +7900,15 @@
                     </a:solidFill>
                   </a:tcPr>
                 </a:tc>
+              </a:tr>
+              <a:tr h="365760">
                 <a:tc>
                   <a:txBody>
                     <a:bodyPr wrap="square"/>
                     <a:lstStyle/>
                     <a:p>
                       <a:r>
-                        <a:rPr sz="1100">
-                          <a:solidFill>
-                            <a:srgbClr val="1F2937"/>
-                          </a:solidFill>
-                          <a:latin typeface="Calibri"/>
-                        </a:rPr>
-                        <a:t>Reports &gt; Operational &gt; Claims</a:t>
-                      </a:r>
-                    </a:p>
-                  </a:txBody>
-                  <a:tcPr marL="73152" marR="73152" marT="27432" marB="27432" anchor="ctr">
-                    <a:solidFill>
-                      <a:srgbClr val="FFFFFF"/>
-                    </a:solidFill>
-                  </a:tcPr>
-                </a:tc>
-              </a:tr>
-              <a:tr h="411480">
-                <a:tc>
-                  <a:txBody>
-                    <a:bodyPr wrap="square"/>
-                    <a:lstStyle/>
-                    <a:p>
-                      <a:r>
-                        <a:rPr sz="1100" b="1">
+                        <a:rPr sz="950" b="1">
                           <a:solidFill>
                             <a:srgbClr val="0B4F9C"/>
                           </a:solidFill>
@@ -7967,7 +7930,7 @@
                     <a:lstStyle/>
                     <a:p>
                       <a:r>
-                        <a:rPr sz="1100">
+                        <a:rPr sz="950">
                           <a:solidFill>
                             <a:srgbClr val="1F2937"/>
                           </a:solidFill>
@@ -7983,37 +7946,15 @@
                     </a:solidFill>
                   </a:tcPr>
                 </a:tc>
+              </a:tr>
+              <a:tr h="365760">
                 <a:tc>
                   <a:txBody>
                     <a:bodyPr wrap="square"/>
                     <a:lstStyle/>
                     <a:p>
                       <a:r>
-                        <a:rPr sz="1100">
-                          <a:solidFill>
-                            <a:srgbClr val="1F2937"/>
-                          </a:solidFill>
-                          <a:latin typeface="Calibri"/>
-                        </a:rPr>
-                        <a:t>Reports &gt; Operational &gt; Renewal</a:t>
-                      </a:r>
-                    </a:p>
-                  </a:txBody>
-                  <a:tcPr marL="73152" marR="73152" marT="27432" marB="27432" anchor="ctr">
-                    <a:solidFill>
-                      <a:srgbClr val="F5F8FC"/>
-                    </a:solidFill>
-                  </a:tcPr>
-                </a:tc>
-              </a:tr>
-              <a:tr h="411480">
-                <a:tc>
-                  <a:txBody>
-                    <a:bodyPr wrap="square"/>
-                    <a:lstStyle/>
-                    <a:p>
-                      <a:r>
-                        <a:rPr sz="1100" b="1">
+                        <a:rPr sz="950" b="1">
                           <a:solidFill>
                             <a:srgbClr val="0B4F9C"/>
                           </a:solidFill>
@@ -8035,7 +7976,7 @@
                     <a:lstStyle/>
                     <a:p>
                       <a:r>
-                        <a:rPr sz="1100">
+                        <a:rPr sz="950">
                           <a:solidFill>
                             <a:srgbClr val="1F2937"/>
                           </a:solidFill>
@@ -8051,37 +7992,15 @@
                     </a:solidFill>
                   </a:tcPr>
                 </a:tc>
+              </a:tr>
+              <a:tr h="365760">
                 <a:tc>
                   <a:txBody>
                     <a:bodyPr wrap="square"/>
                     <a:lstStyle/>
                     <a:p>
                       <a:r>
-                        <a:rPr sz="1100">
-                          <a:solidFill>
-                            <a:srgbClr val="1F2937"/>
-                          </a:solidFill>
-                          <a:latin typeface="Calibri"/>
-                        </a:rPr>
-                        <a:t>Reports &gt; Operational &gt; Remittance</a:t>
-                      </a:r>
-                    </a:p>
-                  </a:txBody>
-                  <a:tcPr marL="73152" marR="73152" marT="27432" marB="27432" anchor="ctr">
-                    <a:solidFill>
-                      <a:srgbClr val="FFFFFF"/>
-                    </a:solidFill>
-                  </a:tcPr>
-                </a:tc>
-              </a:tr>
-              <a:tr h="411480">
-                <a:tc>
-                  <a:txBody>
-                    <a:bodyPr wrap="square"/>
-                    <a:lstStyle/>
-                    <a:p>
-                      <a:r>
-                        <a:rPr sz="1100" b="1">
+                        <a:rPr sz="950" b="1">
                           <a:solidFill>
                             <a:srgbClr val="0B4F9C"/>
                           </a:solidFill>
@@ -8103,7 +8022,7 @@
                     <a:lstStyle/>
                     <a:p>
                       <a:r>
-                        <a:rPr sz="1100">
+                        <a:rPr sz="950">
                           <a:solidFill>
                             <a:srgbClr val="1F2937"/>
                           </a:solidFill>
@@ -8119,37 +8038,15 @@
                     </a:solidFill>
                   </a:tcPr>
                 </a:tc>
+              </a:tr>
+              <a:tr h="365760">
                 <a:tc>
                   <a:txBody>
                     <a:bodyPr wrap="square"/>
                     <a:lstStyle/>
                     <a:p>
                       <a:r>
-                        <a:rPr sz="1100">
-                          <a:solidFill>
-                            <a:srgbClr val="1F2937"/>
-                          </a:solidFill>
-                          <a:latin typeface="Calibri"/>
-                        </a:rPr>
-                        <a:t>Reports &gt; Operational &gt; Broker Commission</a:t>
-                      </a:r>
-                    </a:p>
-                  </a:txBody>
-                  <a:tcPr marL="73152" marR="73152" marT="27432" marB="27432" anchor="ctr">
-                    <a:solidFill>
-                      <a:srgbClr val="F5F8FC"/>
-                    </a:solidFill>
-                  </a:tcPr>
-                </a:tc>
-              </a:tr>
-              <a:tr h="411480">
-                <a:tc>
-                  <a:txBody>
-                    <a:bodyPr wrap="square"/>
-                    <a:lstStyle/>
-                    <a:p>
-                      <a:r>
-                        <a:rPr sz="1100" b="1">
+                        <a:rPr sz="950" b="1">
                           <a:solidFill>
                             <a:srgbClr val="0B4F9C"/>
                           </a:solidFill>
@@ -8171,7 +8068,7 @@
                     <a:lstStyle/>
                     <a:p>
                       <a:r>
-                        <a:rPr sz="1100">
+                        <a:rPr sz="950">
                           <a:solidFill>
                             <a:srgbClr val="1F2937"/>
                           </a:solidFill>
@@ -8187,37 +8084,15 @@
                     </a:solidFill>
                   </a:tcPr>
                 </a:tc>
+              </a:tr>
+              <a:tr h="365760">
                 <a:tc>
                   <a:txBody>
                     <a:bodyPr wrap="square"/>
                     <a:lstStyle/>
                     <a:p>
                       <a:r>
-                        <a:rPr sz="1100">
-                          <a:solidFill>
-                            <a:srgbClr val="1F2937"/>
-                          </a:solidFill>
-                          <a:latin typeface="Calibri"/>
-                        </a:rPr>
-                        <a:t>Executive Dashboard &gt; Export Report</a:t>
-                      </a:r>
-                    </a:p>
-                  </a:txBody>
-                  <a:tcPr marL="73152" marR="73152" marT="27432" marB="27432" anchor="ctr">
-                    <a:solidFill>
-                      <a:srgbClr val="FFFFFF"/>
-                    </a:solidFill>
-                  </a:tcPr>
-                </a:tc>
-              </a:tr>
-              <a:tr h="411480">
-                <a:tc>
-                  <a:txBody>
-                    <a:bodyPr wrap="square"/>
-                    <a:lstStyle/>
-                    <a:p>
-                      <a:r>
-                        <a:rPr sz="1100" b="1">
+                        <a:rPr sz="950" b="1">
                           <a:solidFill>
                             <a:srgbClr val="0B4F9C"/>
                           </a:solidFill>
@@ -8239,7 +8114,7 @@
                     <a:lstStyle/>
                     <a:p>
                       <a:r>
-                        <a:rPr sz="1100">
+                        <a:rPr sz="950">
                           <a:solidFill>
                             <a:srgbClr val="1F2937"/>
                           </a:solidFill>
@@ -8255,37 +8130,15 @@
                     </a:solidFill>
                   </a:tcPr>
                 </a:tc>
+              </a:tr>
+              <a:tr h="365760">
                 <a:tc>
                   <a:txBody>
                     <a:bodyPr wrap="square"/>
                     <a:lstStyle/>
                     <a:p>
                       <a:r>
-                        <a:rPr sz="1100">
-                          <a:solidFill>
-                            <a:srgbClr val="1F2937"/>
-                          </a:solidFill>
-                          <a:latin typeface="Calibri"/>
-                        </a:rPr>
-                        <a:t>Executive Dashboard &gt; Export Report</a:t>
-                      </a:r>
-                    </a:p>
-                  </a:txBody>
-                  <a:tcPr marL="73152" marR="73152" marT="27432" marB="27432" anchor="ctr">
-                    <a:solidFill>
-                      <a:srgbClr val="F5F8FC"/>
-                    </a:solidFill>
-                  </a:tcPr>
-                </a:tc>
-              </a:tr>
-              <a:tr h="411480">
-                <a:tc>
-                  <a:txBody>
-                    <a:bodyPr wrap="square"/>
-                    <a:lstStyle/>
-                    <a:p>
-                      <a:r>
-                        <a:rPr sz="1100" b="1">
+                        <a:rPr sz="950" b="1">
                           <a:solidFill>
                             <a:srgbClr val="0B4F9C"/>
                           </a:solidFill>
@@ -8307,7 +8160,7 @@
                     <a:lstStyle/>
                     <a:p>
                       <a:r>
-                        <a:rPr sz="1100">
+                        <a:rPr sz="950">
                           <a:solidFill>
                             <a:srgbClr val="1F2937"/>
                           </a:solidFill>
@@ -8323,37 +8176,15 @@
                     </a:solidFill>
                   </a:tcPr>
                 </a:tc>
+              </a:tr>
+              <a:tr h="365760">
                 <a:tc>
                   <a:txBody>
                     <a:bodyPr wrap="square"/>
                     <a:lstStyle/>
                     <a:p>
                       <a:r>
-                        <a:rPr sz="1100">
-                          <a:solidFill>
-                            <a:srgbClr val="1F2937"/>
-                          </a:solidFill>
-                          <a:latin typeface="Calibri"/>
-                        </a:rPr>
-                        <a:t>Claims Dashboard &gt; Export Report</a:t>
-                      </a:r>
-                    </a:p>
-                  </a:txBody>
-                  <a:tcPr marL="73152" marR="73152" marT="27432" marB="27432" anchor="ctr">
-                    <a:solidFill>
-                      <a:srgbClr val="FFFFFF"/>
-                    </a:solidFill>
-                  </a:tcPr>
-                </a:tc>
-              </a:tr>
-              <a:tr h="411480">
-                <a:tc>
-                  <a:txBody>
-                    <a:bodyPr wrap="square"/>
-                    <a:lstStyle/>
-                    <a:p>
-                      <a:r>
-                        <a:rPr sz="1100" b="1">
+                        <a:rPr sz="950" b="1">
                           <a:solidFill>
                             <a:srgbClr val="0B4F9C"/>
                           </a:solidFill>
@@ -8375,7 +8206,7 @@
                     <a:lstStyle/>
                     <a:p>
                       <a:r>
-                        <a:rPr sz="1100">
+                        <a:rPr sz="950">
                           <a:solidFill>
                             <a:srgbClr val="1F2937"/>
                           </a:solidFill>
@@ -8391,19 +8222,207 @@
                     </a:solidFill>
                   </a:tcPr>
                 </a:tc>
+              </a:tr>
+            </a:tbl>
+          </a:graphicData>
+        </a:graphic>
+      </p:graphicFrame>
+      <p:graphicFrame>
+        <p:nvGraphicFramePr>
+          <p:cNvPr id="21" name="Table 20"/>
+          <p:cNvGraphicFramePr>
+            <a:graphicFrameLocks noGrp="1"/>
+          </p:cNvGraphicFramePr>
+          <p:nvPr/>
+        </p:nvGraphicFramePr>
+        <p:xfrm>
+          <a:off x="6190488" y="1783080"/>
+          <a:ext cx="5541262" cy="1463040"/>
+        </p:xfrm>
+        <a:graphic>
+          <a:graphicData uri="http://schemas.openxmlformats.org/drawingml/2006/table">
+            <a:tbl>
+              <a:tblPr firstRow="1" bandRow="1">
+                <a:tableStyleId>{5C22544A-7EE6-4342-B048-85BDC9FD1C3A}</a:tableStyleId>
+              </a:tblPr>
+              <a:tblGrid>
+                <a:gridCol w="1920239"/>
+                <a:gridCol w="3621023"/>
+              </a:tblGrid>
+              <a:tr h="365760">
                 <a:tc>
                   <a:txBody>
                     <a:bodyPr wrap="square"/>
                     <a:lstStyle/>
                     <a:p>
                       <a:r>
-                        <a:rPr sz="1100">
+                        <a:rPr sz="950" b="1">
+                          <a:solidFill>
+                            <a:srgbClr val="FFFFFF"/>
+                          </a:solidFill>
+                          <a:latin typeface="Calibri"/>
+                        </a:rPr>
+                        <a:t>Financial report</a:t>
+                      </a:r>
+                    </a:p>
+                  </a:txBody>
+                  <a:tcPr marL="73152" marR="73152" marT="27432" marB="27432" anchor="ctr">
+                    <a:solidFill>
+                      <a:srgbClr val="0B4F9C"/>
+                    </a:solidFill>
+                  </a:tcPr>
+                </a:tc>
+                <a:tc>
+                  <a:txBody>
+                    <a:bodyPr wrap="square"/>
+                    <a:lstStyle/>
+                    <a:p>
+                      <a:r>
+                        <a:rPr sz="950" b="1">
+                          <a:solidFill>
+                            <a:srgbClr val="FFFFFF"/>
+                          </a:solidFill>
+                          <a:latin typeface="Calibri"/>
+                        </a:rPr>
+                        <a:t>What it shows</a:t>
+                      </a:r>
+                    </a:p>
+                  </a:txBody>
+                  <a:tcPr marL="73152" marR="73152" marT="27432" marB="27432" anchor="ctr">
+                    <a:solidFill>
+                      <a:srgbClr val="0B4F9C"/>
+                    </a:solidFill>
+                  </a:tcPr>
+                </a:tc>
+              </a:tr>
+              <a:tr h="365760">
+                <a:tc>
+                  <a:txBody>
+                    <a:bodyPr wrap="square"/>
+                    <a:lstStyle/>
+                    <a:p>
+                      <a:r>
+                        <a:rPr sz="950" b="1">
+                          <a:solidFill>
+                            <a:srgbClr val="0B4F9C"/>
+                          </a:solidFill>
+                          <a:latin typeface="Calibri"/>
+                        </a:rPr>
+                        <a:t>SOA / Premium Receivable</a:t>
+                      </a:r>
+                    </a:p>
+                  </a:txBody>
+                  <a:tcPr marL="73152" marR="73152" marT="27432" marB="27432" anchor="ctr">
+                    <a:solidFill>
+                      <a:srgbClr val="F5F8FC"/>
+                    </a:solidFill>
+                  </a:tcPr>
+                </a:tc>
+                <a:tc>
+                  <a:txBody>
+                    <a:bodyPr wrap="square"/>
+                    <a:lstStyle/>
+                    <a:p>
+                      <a:r>
+                        <a:rPr sz="950">
                           <a:solidFill>
                             <a:srgbClr val="1F2937"/>
                           </a:solidFill>
                           <a:latin typeface="Calibri"/>
                         </a:rPr>
-                        <a:t>Leads &gt; Generate Report</a:t>
+                        <a:t>Bills issued: amount, paid, balance, age and ageing bucket as of To Date</a:t>
+                      </a:r>
+                    </a:p>
+                  </a:txBody>
+                  <a:tcPr marL="73152" marR="73152" marT="27432" marB="27432" anchor="ctr">
+                    <a:solidFill>
+                      <a:srgbClr val="F5F8FC"/>
+                    </a:solidFill>
+                  </a:tcPr>
+                </a:tc>
+              </a:tr>
+              <a:tr h="365760">
+                <a:tc>
+                  <a:txBody>
+                    <a:bodyPr wrap="square"/>
+                    <a:lstStyle/>
+                    <a:p>
+                      <a:r>
+                        <a:rPr sz="950" b="1">
+                          <a:solidFill>
+                            <a:srgbClr val="0B4F9C"/>
+                          </a:solidFill>
+                          <a:latin typeface="Calibri"/>
+                        </a:rPr>
+                        <a:t>Receivables Ageing</a:t>
+                      </a:r>
+                    </a:p>
+                  </a:txBody>
+                  <a:tcPr marL="73152" marR="73152" marT="27432" marB="27432" anchor="ctr">
+                    <a:solidFill>
+                      <a:srgbClr val="FFFFFF"/>
+                    </a:solidFill>
+                  </a:tcPr>
+                </a:tc>
+                <a:tc>
+                  <a:txBody>
+                    <a:bodyPr wrap="square"/>
+                    <a:lstStyle/>
+                    <a:p>
+                      <a:r>
+                        <a:rPr sz="950">
+                          <a:solidFill>
+                            <a:srgbClr val="1F2937"/>
+                          </a:solidFill>
+                          <a:latin typeface="Calibri"/>
+                        </a:rPr>
+                        <a:t>Outstanding receivables by bucket (30/60/90/120 days)</a:t>
+                      </a:r>
+                    </a:p>
+                  </a:txBody>
+                  <a:tcPr marL="73152" marR="73152" marT="27432" marB="27432" anchor="ctr">
+                    <a:solidFill>
+                      <a:srgbClr val="FFFFFF"/>
+                    </a:solidFill>
+                  </a:tcPr>
+                </a:tc>
+              </a:tr>
+              <a:tr h="365760">
+                <a:tc>
+                  <a:txBody>
+                    <a:bodyPr wrap="square"/>
+                    <a:lstStyle/>
+                    <a:p>
+                      <a:r>
+                        <a:rPr sz="950" b="1">
+                          <a:solidFill>
+                            <a:srgbClr val="0B4F9C"/>
+                          </a:solidFill>
+                          <a:latin typeface="Calibri"/>
+                        </a:rPr>
+                        <a:t>Incentive Results</a:t>
+                      </a:r>
+                    </a:p>
+                  </a:txBody>
+                  <a:tcPr marL="73152" marR="73152" marT="27432" marB="27432" anchor="ctr">
+                    <a:solidFill>
+                      <a:srgbClr val="F5F8FC"/>
+                    </a:solidFill>
+                  </a:tcPr>
+                </a:tc>
+                <a:tc>
+                  <a:txBody>
+                    <a:bodyPr wrap="square"/>
+                    <a:lstStyle/>
+                    <a:p>
+                      <a:r>
+                        <a:rPr sz="950">
+                          <a:solidFill>
+                            <a:srgbClr val="1F2937"/>
+                          </a:solidFill>
+                          <a:latin typeface="Calibri"/>
+                        </a:rPr>
+                        <a:t>Programme target, achieved, achievement % and payout per agent</a:t>
                       </a:r>
                     </a:p>
                   </a:txBody>
@@ -10840,7 +10859,7 @@
                 </a:solidFill>
                 <a:latin typeface="Calibri"/>
               </a:rPr>
-              <a:t>Contact number accepts the 10-digit form (9171234567); 09… and +63… forms are not yet accepted.</a:t>
+              <a:t>Your session is kept in the browser’s local storage: sign out on shared computers and keep the browser up to date.</a:t>
             </a:r>
           </a:p>
           <a:p>
@@ -10861,7 +10880,7 @@
                 </a:solidFill>
                 <a:latin typeface="Calibri"/>
               </a:rPr>
-              <a:t>An existing lead has no “Create Quote” action yet: create the quote right after saving the lead.</a:t>
+              <a:t>Two-factor set-up shows a setup key and an app link, but no QR code: type the key into the authenticator app.</a:t>
             </a:r>
           </a:p>
           <a:p>
@@ -10882,91 +10901,7 @@
                 </a:solidFill>
                 <a:latin typeface="Calibri"/>
               </a:rPr>
-              <a:t>Some quote lists (policy types, vehicle details, signatories) are fixed lists until linked to the masters.</a:t>
-            </a:r>
-          </a:p>
-          <a:p>
-            <a:pPr marL="201168" indent="-182880">
-              <a:spcAft>
-                <a:spcPts val="800"/>
-              </a:spcAft>
-              <a:buClr>
-                <a:srgbClr val="5B6778"/>
-              </a:buClr>
-              <a:buFont typeface="Arial"/>
-              <a:buChar char="•"/>
-            </a:pPr>
-            <a:r>
-              <a:rPr sz="1500">
-                <a:solidFill>
-                  <a:srgbClr val="1F2937"/>
-                </a:solidFill>
-                <a:latin typeface="Calibri"/>
-              </a:rPr>
-              <a:t>CTPL treatment (separate policy or part of the premium) is awaiting a business decision.</a:t>
-            </a:r>
-          </a:p>
-          <a:p>
-            <a:pPr marL="201168" indent="-182880">
-              <a:spcAft>
-                <a:spcPts val="800"/>
-              </a:spcAft>
-              <a:buClr>
-                <a:srgbClr val="5B6778"/>
-              </a:buClr>
-              <a:buFont typeface="Arial"/>
-              <a:buChar char="•"/>
-            </a:pPr>
-            <a:r>
-              <a:rPr sz="1500">
-                <a:solidFill>
-                  <a:srgbClr val="1F2937"/>
-                </a:solidFill>
-                <a:latin typeface="Calibri"/>
-              </a:rPr>
-              <a:t>ID card, ID number and vehicle identifiers are not yet mandatory at conversion: check them before Next.</a:t>
-            </a:r>
-          </a:p>
-          <a:p>
-            <a:pPr marL="201168" indent="-182880">
-              <a:spcAft>
-                <a:spcPts val="800"/>
-              </a:spcAft>
-              <a:buClr>
-                <a:srgbClr val="5B6778"/>
-              </a:buClr>
-              <a:buFont typeface="Arial"/>
-              <a:buChar char="•"/>
-            </a:pPr>
-            <a:r>
-              <a:rPr sz="1500">
-                <a:solidFill>
-                  <a:srgbClr val="1F2937"/>
-                </a:solidFill>
-                <a:latin typeface="Calibri"/>
-              </a:rPr>
-              <a:t>The Clients list can fail to open for this role in the current build: open a client from Policy instead.</a:t>
-            </a:r>
-          </a:p>
-          <a:p>
-            <a:pPr marL="201168" indent="-182880">
-              <a:spcAft>
-                <a:spcPts val="800"/>
-              </a:spcAft>
-              <a:buClr>
-                <a:srgbClr val="5B6778"/>
-              </a:buClr>
-              <a:buFont typeface="Arial"/>
-              <a:buChar char="•"/>
-            </a:pPr>
-            <a:r>
-              <a:rPr sz="1500">
-                <a:solidFill>
-                  <a:srgbClr val="1F2937"/>
-                </a:solidFill>
-                <a:latin typeface="Calibri"/>
-              </a:rPr>
-              <a:t>Report screens may show a permission message while loading the agent filter; the report still runs.</a:t>
+              <a:t>Screens are in English or Thai; Filipino is configured but has no translation yet.</a:t>
             </a:r>
           </a:p>
         </p:txBody>
@@ -11087,7 +11022,7 @@
                 </a:solidFill>
                 <a:latin typeface="Calibri"/>
               </a:rPr>
-              <a:t>Create the quote straight after saving the lead.</a:t>
+              <a:t>Create the quote from Lead Details.</a:t>
             </a:r>
           </a:p>
           <a:p>
@@ -11108,7 +11043,7 @@
                 </a:solidFill>
                 <a:latin typeface="Calibri"/>
               </a:rPr>
-              <a:t>Check KYC and vehicle details before converting.</a:t>
+              <a:t>Choose broker or direct bill on Send to Insurance Company.</a:t>
             </a:r>
           </a:p>
           <a:p>
@@ -11457,7 +11392,7 @@
                 </a:solidFill>
                 <a:latin typeface="Calibri"/>
               </a:rPr>
-              <a:t>&lt;to be confirmed by BDOI&gt;</a:t>
+              <a:t>&lt;service desk to be confirmed&gt;</a:t>
             </a:r>
           </a:p>
         </p:txBody>
@@ -12250,7 +12185,7 @@
                 </a:solidFill>
                 <a:latin typeface="Calibri"/>
               </a:rPr>
-              <a:t>User name maria.sales. Lands on Home, the business overview dashboard; the Agent Dashboard is in the Dashboard menu.</a:t>
+              <a:t>User name maria.sales. Lands on the Executive Dashboard; the Agent Dashboard is in the Dashboard menu.</a:t>
             </a:r>
           </a:p>
         </p:txBody>
@@ -12751,7 +12686,7 @@
         <p:spPr>
           <a:xfrm>
             <a:off x="457200" y="1645920"/>
-            <a:ext cx="3636264" cy="3272282"/>
+            <a:ext cx="3636264" cy="3089148"/>
           </a:xfrm>
           <a:prstGeom prst="roundRect">
             <a:avLst>
@@ -12858,7 +12793,7 @@
           <a:p>
             <a:pPr algn="l"/>
             <a:r>
-              <a:rPr sz="1500" b="1" i="0">
+              <a:rPr sz="1400" b="1" i="0">
                 <a:solidFill>
                   <a:srgbClr val="FFFFFF"/>
                 </a:solidFill>
@@ -12878,7 +12813,7 @@
         <p:spPr>
           <a:xfrm>
             <a:off x="566928" y="2121408"/>
-            <a:ext cx="3435095" cy="2723642"/>
+            <a:ext cx="3435095" cy="2540508"/>
           </a:xfrm>
           <a:prstGeom prst="rect">
             <a:avLst/>
@@ -12900,7 +12835,7 @@
               <a:buChar char="•"/>
             </a:pPr>
             <a:r>
-              <a:rPr sz="1400">
+              <a:rPr sz="1300">
                 <a:solidFill>
                   <a:srgbClr val="1F2937"/>
                 </a:solidFill>
@@ -12921,7 +12856,7 @@
               <a:buChar char="•"/>
             </a:pPr>
             <a:r>
-              <a:rPr sz="1400">
+              <a:rPr sz="1300">
                 <a:solidFill>
                   <a:srgbClr val="1F2937"/>
                 </a:solidFill>
@@ -12941,7 +12876,7 @@
         <p:spPr>
           <a:xfrm>
             <a:off x="4276344" y="1645920"/>
-            <a:ext cx="3636264" cy="3272282"/>
+            <a:ext cx="3636264" cy="3089148"/>
           </a:xfrm>
           <a:prstGeom prst="roundRect">
             <a:avLst>
@@ -13048,7 +12983,7 @@
           <a:p>
             <a:pPr algn="l"/>
             <a:r>
-              <a:rPr sz="1500" b="1" i="0">
+              <a:rPr sz="1400" b="1" i="0">
                 <a:solidFill>
                   <a:srgbClr val="FFFFFF"/>
                 </a:solidFill>
@@ -13068,7 +13003,7 @@
         <p:spPr>
           <a:xfrm>
             <a:off x="4386072" y="2121408"/>
-            <a:ext cx="3435095" cy="2723642"/>
+            <a:ext cx="3435095" cy="2540508"/>
           </a:xfrm>
           <a:prstGeom prst="rect">
             <a:avLst/>
@@ -13090,7 +13025,7 @@
               <a:buChar char="•"/>
             </a:pPr>
             <a:r>
-              <a:rPr sz="1400">
+              <a:rPr sz="1300">
                 <a:solidFill>
                   <a:srgbClr val="1F2937"/>
                 </a:solidFill>
@@ -13111,7 +13046,7 @@
               <a:buChar char="•"/>
             </a:pPr>
             <a:r>
-              <a:rPr sz="1400">
+              <a:rPr sz="1300">
                 <a:solidFill>
                   <a:srgbClr val="1F2937"/>
                 </a:solidFill>
@@ -13131,7 +13066,7 @@
         <p:spPr>
           <a:xfrm>
             <a:off x="8095488" y="1645920"/>
-            <a:ext cx="3636264" cy="3272282"/>
+            <a:ext cx="3636264" cy="3089148"/>
           </a:xfrm>
           <a:prstGeom prst="roundRect">
             <a:avLst>
@@ -13238,7 +13173,7 @@
           <a:p>
             <a:pPr algn="l"/>
             <a:r>
-              <a:rPr sz="1500" b="1" i="0">
+              <a:rPr sz="1400" b="1" i="0">
                 <a:solidFill>
                   <a:srgbClr val="FFFFFF"/>
                 </a:solidFill>
@@ -13258,7 +13193,7 @@
         <p:spPr>
           <a:xfrm>
             <a:off x="8205215" y="2121408"/>
-            <a:ext cx="3435095" cy="2723642"/>
+            <a:ext cx="3435095" cy="2540508"/>
           </a:xfrm>
           <a:prstGeom prst="rect">
             <a:avLst/>
@@ -13280,7 +13215,7 @@
               <a:buChar char="•"/>
             </a:pPr>
             <a:r>
-              <a:rPr sz="1400">
+              <a:rPr sz="1300">
                 <a:solidFill>
                   <a:srgbClr val="1F2937"/>
                 </a:solidFill>
@@ -13301,7 +13236,7 @@
               <a:buChar char="•"/>
             </a:pPr>
             <a:r>
-              <a:rPr sz="1400">
+              <a:rPr sz="1300">
                 <a:solidFill>
                   <a:srgbClr val="1F2937"/>
                 </a:solidFill>
@@ -13322,7 +13257,7 @@
               <a:buChar char="•"/>
             </a:pPr>
             <a:r>
-              <a:rPr sz="1400">
+              <a:rPr sz="1300">
                 <a:solidFill>
                   <a:srgbClr val="1F2937"/>
                 </a:solidFill>
@@ -13343,7 +13278,7 @@
               <a:buChar char="•"/>
             </a:pPr>
             <a:r>
-              <a:rPr sz="1400">
+              <a:rPr sz="1300">
                 <a:solidFill>
                   <a:srgbClr val="1F2937"/>
                 </a:solidFill>
@@ -13364,7 +13299,7 @@
               <a:buChar char="•"/>
             </a:pPr>
             <a:r>
-              <a:rPr sz="1400">
+              <a:rPr sz="1300">
                 <a:solidFill>
                   <a:srgbClr val="1F2937"/>
                 </a:solidFill>
@@ -13385,7 +13320,7 @@
               <a:buChar char="•"/>
             </a:pPr>
             <a:r>
-              <a:rPr sz="1400">
+              <a:rPr sz="1300">
                 <a:solidFill>
                   <a:srgbClr val="1F2937"/>
                 </a:solidFill>
@@ -13406,7 +13341,7 @@
               <a:buChar char="•"/>
             </a:pPr>
             <a:r>
-              <a:rPr sz="1400">
+              <a:rPr sz="1300">
                 <a:solidFill>
                   <a:srgbClr val="1F2937"/>
                 </a:solidFill>
@@ -13427,7 +13362,7 @@
               <a:buChar char="•"/>
             </a:pPr>
             <a:r>
-              <a:rPr sz="1400">
+              <a:rPr sz="1300">
                 <a:solidFill>
                   <a:srgbClr val="1F2937"/>
                 </a:solidFill>
@@ -13448,7 +13383,7 @@
               <a:buChar char="•"/>
             </a:pPr>
             <a:r>
-              <a:rPr sz="1400">
+              <a:rPr sz="1300">
                 <a:solidFill>
                   <a:srgbClr val="1F2937"/>
                 </a:solidFill>
@@ -13467,8 +13402,8 @@
         </p:nvSpPr>
         <p:spPr>
           <a:xfrm>
-            <a:off x="457200" y="5101082"/>
-            <a:ext cx="3636264" cy="1116838"/>
+            <a:off x="457200" y="4917948"/>
+            <a:ext cx="3636264" cy="1299972"/>
           </a:xfrm>
           <a:prstGeom prst="roundRect">
             <a:avLst>
@@ -13515,7 +13450,7 @@
         </p:nvSpPr>
         <p:spPr>
           <a:xfrm>
-            <a:off x="457200" y="5101082"/>
+            <a:off x="457200" y="4917948"/>
             <a:ext cx="3636264" cy="384048"/>
           </a:xfrm>
           <a:prstGeom prst="roundRect">
@@ -13561,7 +13496,7 @@
         </p:nvSpPr>
         <p:spPr>
           <a:xfrm>
-            <a:off x="594360" y="5101082"/>
+            <a:off x="594360" y="4917948"/>
             <a:ext cx="3361944" cy="384048"/>
           </a:xfrm>
           <a:prstGeom prst="rect">
@@ -13575,7 +13510,7 @@
           <a:p>
             <a:pPr algn="l"/>
             <a:r>
-              <a:rPr sz="1500" b="1" i="0">
+              <a:rPr sz="1400" b="1" i="0">
                 <a:solidFill>
                   <a:srgbClr val="FFFFFF"/>
                 </a:solidFill>
@@ -13594,8 +13529,8 @@
         </p:nvSpPr>
         <p:spPr>
           <a:xfrm>
-            <a:off x="566928" y="5576570"/>
-            <a:ext cx="3435095" cy="568198"/>
+            <a:off x="566928" y="5393436"/>
+            <a:ext cx="3435095" cy="751332"/>
           </a:xfrm>
           <a:prstGeom prst="rect">
             <a:avLst/>
@@ -13617,7 +13552,7 @@
               <a:buChar char="•"/>
             </a:pPr>
             <a:r>
-              <a:rPr sz="1400">
+              <a:rPr sz="1300">
                 <a:solidFill>
                   <a:srgbClr val="1F2937"/>
                 </a:solidFill>
@@ -13636,8 +13571,8 @@
         </p:nvSpPr>
         <p:spPr>
           <a:xfrm>
-            <a:off x="4276344" y="5101082"/>
-            <a:ext cx="3636264" cy="1116838"/>
+            <a:off x="4276344" y="4917948"/>
+            <a:ext cx="3636264" cy="1299972"/>
           </a:xfrm>
           <a:prstGeom prst="roundRect">
             <a:avLst>
@@ -13684,7 +13619,7 @@
         </p:nvSpPr>
         <p:spPr>
           <a:xfrm>
-            <a:off x="4276344" y="5101082"/>
+            <a:off x="4276344" y="4917948"/>
             <a:ext cx="3636264" cy="384048"/>
           </a:xfrm>
           <a:prstGeom prst="roundRect">
@@ -13730,7 +13665,7 @@
         </p:nvSpPr>
         <p:spPr>
           <a:xfrm>
-            <a:off x="4413504" y="5101082"/>
+            <a:off x="4413504" y="4917948"/>
             <a:ext cx="3361944" cy="384048"/>
           </a:xfrm>
           <a:prstGeom prst="rect">
@@ -13744,7 +13679,7 @@
           <a:p>
             <a:pPr algn="l"/>
             <a:r>
-              <a:rPr sz="1500" b="1" i="0">
+              <a:rPr sz="1400" b="1" i="0">
                 <a:solidFill>
                   <a:srgbClr val="FFFFFF"/>
                 </a:solidFill>
@@ -13763,8 +13698,8 @@
         </p:nvSpPr>
         <p:spPr>
           <a:xfrm>
-            <a:off x="4386072" y="5576570"/>
-            <a:ext cx="3435095" cy="568198"/>
+            <a:off x="4386072" y="5393436"/>
+            <a:ext cx="3435095" cy="751332"/>
           </a:xfrm>
           <a:prstGeom prst="rect">
             <a:avLst/>
@@ -13786,7 +13721,28 @@
               <a:buChar char="•"/>
             </a:pPr>
             <a:r>
-              <a:rPr sz="1400">
+              <a:rPr sz="1300">
+                <a:solidFill>
+                  <a:srgbClr val="1F2937"/>
+                </a:solidFill>
+                <a:latin typeface="Calibri"/>
+              </a:rPr>
+              <a:t>All Reports (12 reports)</a:t>
+            </a:r>
+          </a:p>
+          <a:p>
+            <a:pPr marL="201168" indent="-182880">
+              <a:spcAft>
+                <a:spcPts val="200"/>
+              </a:spcAft>
+              <a:buClr>
+                <a:srgbClr val="1E88E5"/>
+              </a:buClr>
+              <a:buFont typeface="Arial"/>
+              <a:buChar char="•"/>
+            </a:pPr>
+            <a:r>
+              <a:rPr sz="1300">
                 <a:solidFill>
                   <a:srgbClr val="1F2937"/>
                 </a:solidFill>
@@ -14279,7 +14235,7 @@
                 </a:solidFill>
                 <a:latin typeface="Calibri"/>
               </a:rPr>
-              <a:t>Filters:  </a:t>
+              <a:t>Periods:  </a:t>
             </a:r>
             <a:r>
               <a:rPr sz="1500">
@@ -14288,7 +14244,7 @@
                 </a:solidFill>
                 <a:latin typeface="Calibri"/>
               </a:rPr>
-              <a:t>date range and period; Export Report for premium by product.</a:t>
+              <a:t>This Month / Quarter / Year are calendar periods in Manila time.</a:t>
             </a:r>
           </a:p>
           <a:p>
@@ -14814,7 +14770,7 @@
                 </a:solidFill>
                 <a:latin typeface="Calibri"/>
               </a:rPr>
-              <a:t>name, category, date of birth, e-mail, 10-digit mobile are validated.</a:t>
+              <a:t>name, category, date of birth, e-mail and mobile (0917 123 4567 or +63 917 123 4567) are validated.</a:t>
             </a:r>
           </a:p>
           <a:p>
@@ -14874,7 +14830,7 @@
                 </a:solidFill>
                 <a:latin typeface="Calibri"/>
               </a:rPr>
-              <a:t>Create Quote straight after saving; Generate Report gives the Lead Conversion Funnel.</a:t>
+              <a:t>Create Quote from Lead Details; Generate Report downloads the lead list.</a:t>
             </a:r>
           </a:p>
         </p:txBody>
@@ -15370,7 +15326,7 @@
                 </a:solidFill>
                 <a:latin typeface="Calibri"/>
               </a:rPr>
-              <a:t>server re-prices with configured rates: VAT 12%, DST 12.5%, LGT 0.75%.</a:t>
+              <a:t>server re-prices with the configured rates: VAT 12%, DST 12.5%, LGT 0.75%, CTPL tariff.</a:t>
             </a:r>
           </a:p>
           <a:p>
@@ -15926,7 +15882,7 @@
                 </a:solidFill>
                 <a:latin typeface="Calibri"/>
               </a:rPr>
-              <a:t>an accepted quote becomes a policy with documents and vehicle photos.</a:t>
+              <a:t>KYC, vehicle photos, then broker or direct bill on Send to Insurance Company.</a:t>
             </a:r>
           </a:p>
           <a:p>
